--- a/slides/ch12-business-presentations.pptx
+++ b/slides/ch12-business-presentations.pptx
@@ -6594,7 +6594,7 @@
                 </a:solidFill>
                 <a:latin typeface="Calibri"/>
               </a:rPr>
-              <a:t>BADM 225 · Chapter 12</a:t>
+              <a:t>BADM 225 · Chapter 12  ·  © Derek D. Bussan</a:t>
             </a:r>
           </a:p>
         </p:txBody>
@@ -6881,7 +6881,7 @@
                 </a:solidFill>
                 <a:latin typeface="Calibri"/>
               </a:rPr>
-              <a:t>BADM 225 · Chapter 12</a:t>
+              <a:t>BADM 225 · Chapter 12  ·  © Derek D. Bussan</a:t>
             </a:r>
           </a:p>
         </p:txBody>
@@ -7168,7 +7168,7 @@
                 </a:solidFill>
                 <a:latin typeface="Calibri"/>
               </a:rPr>
-              <a:t>BADM 225 · Chapter 12</a:t>
+              <a:t>BADM 225 · Chapter 12  ·  © Derek D. Bussan</a:t>
             </a:r>
           </a:p>
         </p:txBody>
@@ -7455,7 +7455,7 @@
                 </a:solidFill>
                 <a:latin typeface="Calibri"/>
               </a:rPr>
-              <a:t>BADM 225 · Chapter 12</a:t>
+              <a:t>BADM 225 · Chapter 12  ·  © Derek D. Bussan</a:t>
             </a:r>
           </a:p>
         </p:txBody>
@@ -7820,7 +7820,7 @@
                 </a:solidFill>
                 <a:latin typeface="Calibri"/>
               </a:rPr>
-              <a:t>BADM 225 · Chapter 12</a:t>
+              <a:t>BADM 225 · Chapter 12  ·  © Derek D. Bussan</a:t>
             </a:r>
           </a:p>
         </p:txBody>
@@ -7948,7 +7948,7 @@
                 </a:solidFill>
                 <a:latin typeface="Calibri"/>
               </a:rPr>
-              <a:t>BADM 225 · Chapter 12</a:t>
+              <a:t>BADM 225 · Chapter 12  ·  © Derek D. Bussan</a:t>
             </a:r>
           </a:p>
         </p:txBody>
@@ -8235,7 +8235,7 @@
                 </a:solidFill>
                 <a:latin typeface="Calibri"/>
               </a:rPr>
-              <a:t>BADM 225 · Chapter 12</a:t>
+              <a:t>BADM 225 · Chapter 12  ·  © Derek D. Bussan</a:t>
             </a:r>
           </a:p>
         </p:txBody>
@@ -8522,7 +8522,7 @@
                 </a:solidFill>
                 <a:latin typeface="Calibri"/>
               </a:rPr>
-              <a:t>BADM 225 · Chapter 12</a:t>
+              <a:t>BADM 225 · Chapter 12  ·  © Derek D. Bussan</a:t>
             </a:r>
           </a:p>
         </p:txBody>
@@ -8887,7 +8887,7 @@
                 </a:solidFill>
                 <a:latin typeface="Calibri"/>
               </a:rPr>
-              <a:t>BADM 225 · Chapter 12</a:t>
+              <a:t>BADM 225 · Chapter 12  ·  © Derek D. Bussan</a:t>
             </a:r>
           </a:p>
         </p:txBody>
@@ -9015,7 +9015,7 @@
                 </a:solidFill>
                 <a:latin typeface="Calibri"/>
               </a:rPr>
-              <a:t>BADM 225 · Chapter 12</a:t>
+              <a:t>BADM 225 · Chapter 12  ·  © Derek D. Bussan</a:t>
             </a:r>
           </a:p>
         </p:txBody>
@@ -9722,7 +9722,7 @@
                 </a:solidFill>
                 <a:latin typeface="Calibri"/>
               </a:rPr>
-              <a:t>BADM 225 · Chapter 12</a:t>
+              <a:t>BADM 225 · Chapter 12  ·  © Derek D. Bussan</a:t>
             </a:r>
           </a:p>
         </p:txBody>
@@ -10043,7 +10043,7 @@
                 </a:solidFill>
                 <a:latin typeface="Calibri"/>
               </a:rPr>
-              <a:t>BADM 225 · Chapter 12</a:t>
+              <a:t>BADM 225 · Chapter 12  ·  © Derek D. Bussan</a:t>
             </a:r>
           </a:p>
         </p:txBody>
@@ -10435,7 +10435,7 @@
                 </a:solidFill>
                 <a:latin typeface="Calibri"/>
               </a:rPr>
-              <a:t>BADM 225 · Chapter 12</a:t>
+              <a:t>BADM 225 · Chapter 12  ·  © Derek D. Bussan</a:t>
             </a:r>
           </a:p>
         </p:txBody>
@@ -10722,7 +10722,7 @@
                 </a:solidFill>
                 <a:latin typeface="Calibri"/>
               </a:rPr>
-              <a:t>BADM 225 · Chapter 12</a:t>
+              <a:t>BADM 225 · Chapter 12  ·  © Derek D. Bussan</a:t>
             </a:r>
           </a:p>
         </p:txBody>
@@ -11009,7 +11009,7 @@
                 </a:solidFill>
                 <a:latin typeface="Calibri"/>
               </a:rPr>
-              <a:t>BADM 225 · Chapter 12</a:t>
+              <a:t>BADM 225 · Chapter 12  ·  © Derek D. Bussan</a:t>
             </a:r>
           </a:p>
         </p:txBody>
@@ -11374,7 +11374,7 @@
                 </a:solidFill>
                 <a:latin typeface="Calibri"/>
               </a:rPr>
-              <a:t>BADM 225 · Chapter 12</a:t>
+              <a:t>BADM 225 · Chapter 12  ·  © Derek D. Bussan</a:t>
             </a:r>
           </a:p>
         </p:txBody>
@@ -11502,7 +11502,7 @@
                 </a:solidFill>
                 <a:latin typeface="Calibri"/>
               </a:rPr>
-              <a:t>BADM 225 · Chapter 12</a:t>
+              <a:t>BADM 225 · Chapter 12  ·  © Derek D. Bussan</a:t>
             </a:r>
           </a:p>
         </p:txBody>
@@ -11828,7 +11828,7 @@
                 </a:solidFill>
                 <a:latin typeface="Calibri"/>
               </a:rPr>
-              <a:t>BADM 225 · Chapter 12</a:t>
+              <a:t>BADM 225 · Chapter 12  ·  © Derek D. Bussan</a:t>
             </a:r>
           </a:p>
         </p:txBody>
@@ -12149,7 +12149,7 @@
                 </a:solidFill>
                 <a:latin typeface="Calibri"/>
               </a:rPr>
-              <a:t>BADM 225 · Chapter 12</a:t>
+              <a:t>BADM 225 · Chapter 12  ·  © Derek D. Bussan</a:t>
             </a:r>
           </a:p>
         </p:txBody>
@@ -12709,7 +12709,7 @@
                 </a:solidFill>
                 <a:latin typeface="Calibri"/>
               </a:rPr>
-              <a:t>BADM 225 · Chapter 12</a:t>
+              <a:t>BADM 225 · Chapter 12  ·  © Derek D. Bussan</a:t>
             </a:r>
           </a:p>
         </p:txBody>
@@ -13030,7 +13030,7 @@
                 </a:solidFill>
                 <a:latin typeface="Calibri"/>
               </a:rPr>
-              <a:t>BADM 225 · Chapter 12</a:t>
+              <a:t>BADM 225 · Chapter 12  ·  © Derek D. Bussan</a:t>
             </a:r>
           </a:p>
         </p:txBody>
@@ -13351,7 +13351,7 @@
                 </a:solidFill>
                 <a:latin typeface="Calibri"/>
               </a:rPr>
-              <a:t>BADM 225 · Chapter 12</a:t>
+              <a:t>BADM 225 · Chapter 12  ·  © Derek D. Bussan</a:t>
             </a:r>
           </a:p>
         </p:txBody>
@@ -13755,7 +13755,7 @@
                 </a:solidFill>
                 <a:latin typeface="Calibri"/>
               </a:rPr>
-              <a:t>BADM 225 · Chapter 12</a:t>
+              <a:t>BADM 225 · Chapter 12  ·  © Derek D. Bussan</a:t>
             </a:r>
           </a:p>
         </p:txBody>
@@ -13883,7 +13883,7 @@
                 </a:solidFill>
                 <a:latin typeface="Calibri"/>
               </a:rPr>
-              <a:t>BADM 225 · Chapter 12</a:t>
+              <a:t>BADM 225 · Chapter 12  ·  © Derek D. Bussan</a:t>
             </a:r>
           </a:p>
         </p:txBody>
@@ -14204,7 +14204,7 @@
                 </a:solidFill>
                 <a:latin typeface="Calibri"/>
               </a:rPr>
-              <a:t>BADM 225 · Chapter 12</a:t>
+              <a:t>BADM 225 · Chapter 12  ·  © Derek D. Bussan</a:t>
             </a:r>
           </a:p>
         </p:txBody>
@@ -14603,7 +14603,7 @@
                 </a:solidFill>
                 <a:latin typeface="Calibri"/>
               </a:rPr>
-              <a:t>BADM 225 · Chapter 12</a:t>
+              <a:t>BADM 225 · Chapter 12  ·  © Derek D. Bussan</a:t>
             </a:r>
           </a:p>
         </p:txBody>
@@ -14731,7 +14731,7 @@
                 </a:solidFill>
                 <a:latin typeface="Calibri"/>
               </a:rPr>
-              <a:t>BADM 225 · Chapter 12</a:t>
+              <a:t>BADM 225 · Chapter 12  ·  © Derek D. Bussan</a:t>
             </a:r>
           </a:p>
         </p:txBody>
@@ -15052,7 +15052,7 @@
                 </a:solidFill>
                 <a:latin typeface="Calibri"/>
               </a:rPr>
-              <a:t>BADM 225 · Chapter 12</a:t>
+              <a:t>BADM 225 · Chapter 12  ·  © Derek D. Bussan</a:t>
             </a:r>
           </a:p>
         </p:txBody>
@@ -15339,7 +15339,7 @@
                 </a:solidFill>
                 <a:latin typeface="Calibri"/>
               </a:rPr>
-              <a:t>BADM 225 · Chapter 12</a:t>
+              <a:t>BADM 225 · Chapter 12  ·  © Derek D. Bussan</a:t>
             </a:r>
           </a:p>
         </p:txBody>
@@ -15660,7 +15660,7 @@
                 </a:solidFill>
                 <a:latin typeface="Calibri"/>
               </a:rPr>
-              <a:t>BADM 225 · Chapter 12</a:t>
+              <a:t>BADM 225 · Chapter 12  ·  © Derek D. Bussan</a:t>
             </a:r>
           </a:p>
         </p:txBody>
@@ -15947,7 +15947,7 @@
                 </a:solidFill>
                 <a:latin typeface="Calibri"/>
               </a:rPr>
-              <a:t>BADM 225 · Chapter 12</a:t>
+              <a:t>BADM 225 · Chapter 12  ·  © Derek D. Bussan</a:t>
             </a:r>
           </a:p>
         </p:txBody>
@@ -16762,7 +16762,7 @@
                 </a:solidFill>
                 <a:latin typeface="Calibri"/>
               </a:rPr>
-              <a:t>BADM 225 · Chapter 12</a:t>
+              <a:t>BADM 225 · Chapter 12  ·  © Derek D. Bussan</a:t>
             </a:r>
           </a:p>
         </p:txBody>
@@ -16968,7 +16968,7 @@
                 </a:solidFill>
                 <a:latin typeface="Calibri"/>
               </a:rPr>
-              <a:t>BADM 225 · Chapter 12</a:t>
+              <a:t>BADM 225 · Chapter 12  ·  © Derek D. Bussan</a:t>
             </a:r>
           </a:p>
         </p:txBody>
@@ -17244,7 +17244,7 @@
                 </a:solidFill>
                 <a:latin typeface="Calibri"/>
               </a:rPr>
-              <a:t>BADM 225 · Chapter 12</a:t>
+              <a:t>BADM 225 · Chapter 12  ·  © Derek D. Bussan</a:t>
             </a:r>
           </a:p>
         </p:txBody>
@@ -17337,7 +17337,7 @@
                 </a:solidFill>
                 <a:latin typeface="Calibri"/>
               </a:rPr>
-              <a:t>BADM 225 · Chapter 12</a:t>
+              <a:t>BADM 225 · Chapter 12  ·  © Derek D. Bussan</a:t>
             </a:r>
           </a:p>
         </p:txBody>
@@ -17658,7 +17658,7 @@
                 </a:solidFill>
                 <a:latin typeface="Calibri"/>
               </a:rPr>
-              <a:t>BADM 225 · Chapter 12</a:t>
+              <a:t>BADM 225 · Chapter 12  ·  © Derek D. Bussan</a:t>
             </a:r>
           </a:p>
         </p:txBody>
@@ -17945,7 +17945,7 @@
                 </a:solidFill>
                 <a:latin typeface="Calibri"/>
               </a:rPr>
-              <a:t>BADM 225 · Chapter 12</a:t>
+              <a:t>BADM 225 · Chapter 12  ·  © Derek D. Bussan</a:t>
             </a:r>
           </a:p>
         </p:txBody>
@@ -18232,7 +18232,7 @@
                 </a:solidFill>
                 <a:latin typeface="Calibri"/>
               </a:rPr>
-              <a:t>BADM 225 · Chapter 12</a:t>
+              <a:t>BADM 225 · Chapter 12  ·  © Derek D. Bussan</a:t>
             </a:r>
           </a:p>
         </p:txBody>
@@ -18674,7 +18674,7 @@
                 </a:solidFill>
                 <a:latin typeface="Calibri"/>
               </a:rPr>
-              <a:t>BADM 225 · Chapter 12</a:t>
+              <a:t>BADM 225 · Chapter 12  ·  © Derek D. Bussan</a:t>
             </a:r>
           </a:p>
         </p:txBody>
@@ -19406,7 +19406,7 @@
                 </a:solidFill>
                 <a:latin typeface="Calibri"/>
               </a:rPr>
-              <a:t>BADM 225 · Chapter 12</a:t>
+              <a:t>BADM 225 · Chapter 12  ·  © Derek D. Bussan</a:t>
             </a:r>
           </a:p>
         </p:txBody>

--- a/slides/ch12-business-presentations.pptx
+++ b/slides/ch12-business-presentations.pptx
@@ -6501,7 +6501,7 @@
                 </a:solidFill>
                 <a:latin typeface="Calibri"/>
               </a:rPr>
-              <a:t>BADM 225 · Chapter 12  ·  Original instructional material — no publisher content</a:t>
+              <a:t>BADM 225 · Chapter 12  ·  Original material © 2026 Derek D. Bussan, PhD, MBA  ·  No publisher content</a:t>
             </a:r>
           </a:p>
         </p:txBody>
